--- a/templates/FACA_Report.pptx
+++ b/templates/FACA_Report.pptx
@@ -9,6 +9,7 @@
   </p:notesMasterIdLst>
   <p:sldIdLst>
     <p:sldId id="256" r:id="rId8"/>
+    <p:sldId id="257" r:id="rId9"/>
   </p:sldIdLst>
   <p:sldSz cx="24384000" cy="13716000"/>
   <p:notesSz cx="6858000" cy="9144000"/>
@@ -63,10 +64,10 @@
         </a:solidFill>
         <a:effectLst/>
         <a:uFillTx/>
-        <a:latin typeface="Helvetica Neue Medium"/>
-        <a:ea typeface="Helvetica Neue Medium"/>
-        <a:cs typeface="Helvetica Neue Medium"/>
-        <a:sym typeface="Helvetica Neue Medium"/>
+        <a:latin typeface="+mn-lt"/>
+        <a:ea typeface="+mn-ea"/>
+        <a:cs typeface="+mn-cs"/>
+        <a:sym typeface="Helvetica Neue"/>
       </a:defRPr>
     </a:lvl1pPr>
     <a:lvl2pPr marL="0" marR="0" indent="0" algn="ctr" defTabSz="825500" rtl="0" fontAlgn="auto" latinLnBrk="0" hangingPunct="0">
@@ -93,10 +94,10 @@
         </a:solidFill>
         <a:effectLst/>
         <a:uFillTx/>
-        <a:latin typeface="Helvetica Neue Medium"/>
-        <a:ea typeface="Helvetica Neue Medium"/>
-        <a:cs typeface="Helvetica Neue Medium"/>
-        <a:sym typeface="Helvetica Neue Medium"/>
+        <a:latin typeface="+mn-lt"/>
+        <a:ea typeface="+mn-ea"/>
+        <a:cs typeface="+mn-cs"/>
+        <a:sym typeface="Helvetica Neue"/>
       </a:defRPr>
     </a:lvl2pPr>
     <a:lvl3pPr marL="0" marR="0" indent="0" algn="ctr" defTabSz="825500" rtl="0" fontAlgn="auto" latinLnBrk="0" hangingPunct="0">
@@ -123,10 +124,10 @@
         </a:solidFill>
         <a:effectLst/>
         <a:uFillTx/>
-        <a:latin typeface="Helvetica Neue Medium"/>
-        <a:ea typeface="Helvetica Neue Medium"/>
-        <a:cs typeface="Helvetica Neue Medium"/>
-        <a:sym typeface="Helvetica Neue Medium"/>
+        <a:latin typeface="+mn-lt"/>
+        <a:ea typeface="+mn-ea"/>
+        <a:cs typeface="+mn-cs"/>
+        <a:sym typeface="Helvetica Neue"/>
       </a:defRPr>
     </a:lvl3pPr>
     <a:lvl4pPr marL="0" marR="0" indent="0" algn="ctr" defTabSz="825500" rtl="0" fontAlgn="auto" latinLnBrk="0" hangingPunct="0">
@@ -153,10 +154,10 @@
         </a:solidFill>
         <a:effectLst/>
         <a:uFillTx/>
-        <a:latin typeface="Helvetica Neue Medium"/>
-        <a:ea typeface="Helvetica Neue Medium"/>
-        <a:cs typeface="Helvetica Neue Medium"/>
-        <a:sym typeface="Helvetica Neue Medium"/>
+        <a:latin typeface="+mn-lt"/>
+        <a:ea typeface="+mn-ea"/>
+        <a:cs typeface="+mn-cs"/>
+        <a:sym typeface="Helvetica Neue"/>
       </a:defRPr>
     </a:lvl4pPr>
     <a:lvl5pPr marL="0" marR="0" indent="0" algn="ctr" defTabSz="825500" rtl="0" fontAlgn="auto" latinLnBrk="0" hangingPunct="0">
@@ -183,10 +184,10 @@
         </a:solidFill>
         <a:effectLst/>
         <a:uFillTx/>
-        <a:latin typeface="Helvetica Neue Medium"/>
-        <a:ea typeface="Helvetica Neue Medium"/>
-        <a:cs typeface="Helvetica Neue Medium"/>
-        <a:sym typeface="Helvetica Neue Medium"/>
+        <a:latin typeface="+mn-lt"/>
+        <a:ea typeface="+mn-ea"/>
+        <a:cs typeface="+mn-cs"/>
+        <a:sym typeface="Helvetica Neue"/>
       </a:defRPr>
     </a:lvl5pPr>
     <a:lvl6pPr marL="0" marR="0" indent="0" algn="ctr" defTabSz="825500" rtl="0" fontAlgn="auto" latinLnBrk="0" hangingPunct="0">
@@ -213,10 +214,10 @@
         </a:solidFill>
         <a:effectLst/>
         <a:uFillTx/>
-        <a:latin typeface="Helvetica Neue Medium"/>
-        <a:ea typeface="Helvetica Neue Medium"/>
-        <a:cs typeface="Helvetica Neue Medium"/>
-        <a:sym typeface="Helvetica Neue Medium"/>
+        <a:latin typeface="+mn-lt"/>
+        <a:ea typeface="+mn-ea"/>
+        <a:cs typeface="+mn-cs"/>
+        <a:sym typeface="Helvetica Neue"/>
       </a:defRPr>
     </a:lvl6pPr>
     <a:lvl7pPr marL="0" marR="0" indent="0" algn="ctr" defTabSz="825500" rtl="0" fontAlgn="auto" latinLnBrk="0" hangingPunct="0">
@@ -243,10 +244,10 @@
         </a:solidFill>
         <a:effectLst/>
         <a:uFillTx/>
-        <a:latin typeface="Helvetica Neue Medium"/>
-        <a:ea typeface="Helvetica Neue Medium"/>
-        <a:cs typeface="Helvetica Neue Medium"/>
-        <a:sym typeface="Helvetica Neue Medium"/>
+        <a:latin typeface="+mn-lt"/>
+        <a:ea typeface="+mn-ea"/>
+        <a:cs typeface="+mn-cs"/>
+        <a:sym typeface="Helvetica Neue"/>
       </a:defRPr>
     </a:lvl7pPr>
     <a:lvl8pPr marL="0" marR="0" indent="0" algn="ctr" defTabSz="825500" rtl="0" fontAlgn="auto" latinLnBrk="0" hangingPunct="0">
@@ -273,10 +274,10 @@
         </a:solidFill>
         <a:effectLst/>
         <a:uFillTx/>
-        <a:latin typeface="Helvetica Neue Medium"/>
-        <a:ea typeface="Helvetica Neue Medium"/>
-        <a:cs typeface="Helvetica Neue Medium"/>
-        <a:sym typeface="Helvetica Neue Medium"/>
+        <a:latin typeface="+mn-lt"/>
+        <a:ea typeface="+mn-ea"/>
+        <a:cs typeface="+mn-cs"/>
+        <a:sym typeface="Helvetica Neue"/>
       </a:defRPr>
     </a:lvl8pPr>
     <a:lvl9pPr marL="0" marR="0" indent="0" algn="ctr" defTabSz="825500" rtl="0" fontAlgn="auto" latinLnBrk="0" hangingPunct="0">
@@ -303,10 +304,10 @@
         </a:solidFill>
         <a:effectLst/>
         <a:uFillTx/>
-        <a:latin typeface="Helvetica Neue Medium"/>
-        <a:ea typeface="Helvetica Neue Medium"/>
-        <a:cs typeface="Helvetica Neue Medium"/>
-        <a:sym typeface="Helvetica Neue Medium"/>
+        <a:latin typeface="+mn-lt"/>
+        <a:ea typeface="+mn-ea"/>
+        <a:cs typeface="+mn-cs"/>
+        <a:sym typeface="Helvetica Neue"/>
       </a:defRPr>
     </a:lvl9pPr>
   </p:defaultTextStyle>
@@ -682,8 +683,8 @@
         </p:nvSpPr>
         <p:spPr>
           <a:xfrm>
-            <a:off x="517059" y="1257300"/>
-            <a:ext cx="23315954" cy="0"/>
+            <a:off x="517067" y="1257300"/>
+            <a:ext cx="23315955" cy="0"/>
           </a:xfrm>
           <a:prstGeom prst="line">
             <a:avLst/>
@@ -1051,7 +1052,7 @@
         <p:spPr>
           <a:xfrm>
             <a:off x="12408261" y="13390957"/>
-            <a:ext cx="362815" cy="363143"/>
+            <a:ext cx="362815" cy="363144"/>
           </a:xfrm>
           <a:prstGeom prst="rect">
             <a:avLst/>
@@ -1144,8 +1145,8 @@
         </p:nvSpPr>
         <p:spPr>
           <a:xfrm>
-            <a:off x="517057" y="1244599"/>
-            <a:ext cx="23315956" cy="1"/>
+            <a:off x="517048" y="1244599"/>
+            <a:ext cx="23315963" cy="11"/>
           </a:xfrm>
           <a:prstGeom prst="line">
             <a:avLst/>
@@ -1192,9 +1193,9 @@
                     <a:bodyPr/>
                     <a:lstStyle/>
                     <a:p>
-                      <a:pPr indent="457200">
+                      <a:pPr>
                         <a:defRPr>
-                          <a:sym typeface="Helvetica Neue Medium"/>
+                          <a:sym typeface="Helvetica Neue"/>
                         </a:defRPr>
                       </a:pPr>
                     </a:p>
@@ -1312,8 +1313,8 @@
         </p:nvSpPr>
         <p:spPr>
           <a:xfrm>
-            <a:off x="514941" y="292472"/>
-            <a:ext cx="23320191" cy="932609"/>
+            <a:off x="514941" y="292471"/>
+            <a:ext cx="23320191" cy="932612"/>
           </a:xfrm>
           <a:prstGeom prst="rect">
             <a:avLst/>
@@ -1381,7 +1382,7 @@
         <p:spPr>
           <a:xfrm>
             <a:off x="12482710" y="13373100"/>
-            <a:ext cx="283769" cy="287680"/>
+            <a:ext cx="283770" cy="287680"/>
           </a:xfrm>
           <a:prstGeom prst="rect">
             <a:avLst/>
@@ -1486,8 +1487,8 @@
         </p:nvSpPr>
         <p:spPr>
           <a:xfrm>
-            <a:off x="517059" y="1257300"/>
-            <a:ext cx="23315954" cy="0"/>
+            <a:off x="517067" y="1257300"/>
+            <a:ext cx="23315955" cy="0"/>
           </a:xfrm>
           <a:prstGeom prst="line">
             <a:avLst/>
@@ -1835,7 +1836,7 @@
         <p:spPr>
           <a:xfrm>
             <a:off x="12408261" y="13390957"/>
-            <a:ext cx="362815" cy="363143"/>
+            <a:ext cx="362815" cy="363144"/>
           </a:xfrm>
           <a:prstGeom prst="rect">
             <a:avLst/>
@@ -1892,7 +1893,7 @@
         </p:nvSpPr>
         <p:spPr>
           <a:xfrm>
-            <a:off x="21130622" y="13373100"/>
+            <a:off x="21130620" y="13373100"/>
             <a:ext cx="3136603" cy="228600"/>
           </a:xfrm>
           <a:prstGeom prst="rect">
@@ -1946,7 +1947,7 @@
         <p:spPr>
           <a:xfrm>
             <a:off x="95095863" y="58293000"/>
-            <a:ext cx="22072603" cy="1016000"/>
+            <a:ext cx="22072610" cy="1016000"/>
           </a:xfrm>
           <a:prstGeom prst="rect">
             <a:avLst/>
@@ -1985,7 +1986,7 @@
                 <a:sym typeface="Helvetica"/>
               </a:defRPr>
             </a:lvl2pPr>
-            <a:lvl3pPr marL="2002692" indent="-732692">
+            <a:lvl3pPr marL="2002688" indent="-732692">
               <a:spcBef>
                 <a:spcPts val="6800"/>
               </a:spcBef>
@@ -1999,7 +2000,7 @@
                 <a:sym typeface="Helvetica"/>
               </a:defRPr>
             </a:lvl3pPr>
-            <a:lvl4pPr marL="2637692" indent="-732692">
+            <a:lvl4pPr marL="2637688" indent="-732688">
               <a:spcBef>
                 <a:spcPts val="6800"/>
               </a:spcBef>
@@ -2155,8 +2156,8 @@
         </p:nvSpPr>
         <p:spPr>
           <a:xfrm>
-            <a:off x="1142998" y="2743200"/>
-            <a:ext cx="22098004" cy="8229600"/>
+            <a:off x="1142996" y="2743200"/>
+            <a:ext cx="22098008" cy="8229600"/>
           </a:xfrm>
           <a:prstGeom prst="rect">
             <a:avLst/>
@@ -2175,7 +2176,7 @@
                 </a:srgbClr>
               </a:buClr>
               <a:buSzPct val="25000"/>
-              <a:defRPr b="1" spc="-182" sz="9100">
+              <a:defRPr b="1" spc="-200" sz="9100">
                 <a:latin typeface="+mj-lt"/>
                 <a:ea typeface="+mj-ea"/>
                 <a:cs typeface="+mj-cs"/>
@@ -2213,8 +2214,8 @@
         </p:blipFill>
         <p:spPr>
           <a:xfrm>
-            <a:off x="943462" y="877653"/>
-            <a:ext cx="1320551" cy="1320550"/>
+            <a:off x="943461" y="877653"/>
+            <a:ext cx="1320552" cy="1320552"/>
           </a:xfrm>
           <a:prstGeom prst="rect">
             <a:avLst/>
@@ -2234,7 +2235,7 @@
         </p:nvSpPr>
         <p:spPr>
           <a:xfrm>
-            <a:off x="23966213" y="13042900"/>
+            <a:off x="23966215" y="13042900"/>
             <a:ext cx="326195" cy="330200"/>
           </a:xfrm>
           <a:prstGeom prst="rect">
@@ -2299,7 +2300,7 @@
         </p:nvSpPr>
         <p:spPr>
           <a:xfrm>
-            <a:off x="21130622" y="13373100"/>
+            <a:off x="21130620" y="13373100"/>
             <a:ext cx="3136603" cy="228600"/>
           </a:xfrm>
           <a:prstGeom prst="rect">
@@ -3002,8 +3003,8 @@
         </p:nvSpPr>
         <p:spPr>
           <a:xfrm>
-            <a:off x="593094" y="881059"/>
-            <a:ext cx="23197812" cy="1"/>
+            <a:off x="593101" y="881059"/>
+            <a:ext cx="23197815" cy="11"/>
           </a:xfrm>
           <a:prstGeom prst="line">
             <a:avLst/>
@@ -3033,7 +3034,7 @@
         <p:spPr>
           <a:xfrm>
             <a:off x="616380" y="-655237"/>
-            <a:ext cx="21225642" cy="2221044"/>
+            <a:ext cx="21225643" cy="2221047"/>
           </a:xfrm>
           <a:prstGeom prst="rect">
             <a:avLst/>
@@ -3042,7 +3043,7 @@
         <p:txBody>
           <a:bodyPr lIns="80642" tIns="80642" rIns="80642" bIns="80642"/>
           <a:lstStyle>
-            <a:lvl1pPr marR="48894" indent="48894" algn="l" defTabSz="869950">
+            <a:lvl1pPr marR="48893" indent="48893" algn="l" defTabSz="869950">
               <a:defRPr sz="5600">
                 <a:solidFill>
                   <a:srgbClr val="929292"/>
@@ -3077,8 +3078,8 @@
         </p:nvSpPr>
         <p:spPr>
           <a:xfrm>
-            <a:off x="2592142" y="2368879"/>
-            <a:ext cx="19203079" cy="11347127"/>
+            <a:off x="2592141" y="2368879"/>
+            <a:ext cx="19203081" cy="11347127"/>
           </a:xfrm>
           <a:prstGeom prst="rect">
             <a:avLst/>
@@ -3087,7 +3088,7 @@
         <p:txBody>
           <a:bodyPr lIns="80642" tIns="80642" rIns="80642" bIns="80642" anchor="t"/>
           <a:lstStyle>
-            <a:lvl1pPr marL="82550" marR="48894" indent="-34289" defTabSz="869950">
+            <a:lvl1pPr marL="0" marR="48893" indent="48259" defTabSz="869950">
               <a:spcBef>
                 <a:spcPts val="500"/>
               </a:spcBef>
@@ -3108,7 +3109,7 @@
                 <a:sym typeface="Arial"/>
               </a:defRPr>
             </a:lvl1pPr>
-            <a:lvl2pPr marL="82550" marR="48894" indent="48260" defTabSz="869950">
+            <a:lvl2pPr marL="0" marR="48893" indent="48259" defTabSz="869950">
               <a:spcBef>
                 <a:spcPts val="500"/>
               </a:spcBef>
@@ -3129,7 +3130,7 @@
                 <a:sym typeface="Arial"/>
               </a:defRPr>
             </a:lvl2pPr>
-            <a:lvl3pPr marL="82550" marR="48894" indent="48260" defTabSz="869950">
+            <a:lvl3pPr marL="0" marR="48893" indent="48259" defTabSz="869950">
               <a:spcBef>
                 <a:spcPts val="500"/>
               </a:spcBef>
@@ -3150,7 +3151,7 @@
                 <a:sym typeface="Arial"/>
               </a:defRPr>
             </a:lvl3pPr>
-            <a:lvl4pPr marL="82550" marR="48894" indent="48260" defTabSz="869950">
+            <a:lvl4pPr marL="0" marR="48893" indent="48259" defTabSz="869950">
               <a:spcBef>
                 <a:spcPts val="500"/>
               </a:spcBef>
@@ -3171,7 +3172,7 @@
                 <a:sym typeface="Arial"/>
               </a:defRPr>
             </a:lvl4pPr>
-            <a:lvl5pPr marL="82550" marR="48894" indent="48260" defTabSz="869950">
+            <a:lvl5pPr marL="0" marR="48893" indent="48259" defTabSz="869950">
               <a:spcBef>
                 <a:spcPts val="500"/>
               </a:spcBef>
@@ -3305,7 +3306,7 @@
         <p:spPr>
           <a:xfrm>
             <a:off x="1201340" y="11859862"/>
-            <a:ext cx="21971004" cy="636980"/>
+            <a:ext cx="21971005" cy="636990"/>
           </a:xfrm>
           <a:prstGeom prst="rect">
             <a:avLst/>
@@ -3325,7 +3326,7 @@
               </a:tabLst>
               <a:defRPr sz="3000" u="sng"/>
             </a:lvl1pPr>
-            <a:lvl2pPr marL="1001346" indent="-366346" defTabSz="701675">
+            <a:lvl2pPr marL="1001344" indent="-366346" defTabSz="701675">
               <a:spcBef>
                 <a:spcPts val="0"/>
               </a:spcBef>
@@ -3405,7 +3406,7 @@
         <p:spPr>
           <a:xfrm>
             <a:off x="1206496" y="2574991"/>
-            <a:ext cx="21971005" cy="4648202"/>
+            <a:ext cx="21971005" cy="4648204"/>
           </a:xfrm>
           <a:prstGeom prst="rect">
             <a:avLst/>
@@ -3445,7 +3446,7 @@
         <p:spPr>
           <a:xfrm>
             <a:off x="1201342" y="7223190"/>
-            <a:ext cx="21971002" cy="1905002"/>
+            <a:ext cx="21971002" cy="1905003"/>
           </a:xfrm>
           <a:prstGeom prst="rect">
             <a:avLst/>
@@ -3481,8 +3482,8 @@
         </p:nvSpPr>
         <p:spPr>
           <a:xfrm>
-            <a:off x="14630400" y="12712700"/>
-            <a:ext cx="5689600" cy="736600"/>
+            <a:off x="17248581" y="12712700"/>
+            <a:ext cx="453239" cy="461059"/>
           </a:xfrm>
           <a:prstGeom prst="rect">
             <a:avLst/>
@@ -3531,8 +3532,8 @@
         </p:nvSpPr>
         <p:spPr>
           <a:xfrm>
-            <a:off x="-95253" y="13392150"/>
-            <a:ext cx="24517356" cy="457200"/>
+            <a:off x="-95254" y="13392150"/>
+            <a:ext cx="24517358" cy="457200"/>
           </a:xfrm>
           <a:prstGeom prst="rect">
             <a:avLst/>
@@ -3577,8 +3578,8 @@
         </p:nvSpPr>
         <p:spPr>
           <a:xfrm>
-            <a:off x="517055" y="1257299"/>
-            <a:ext cx="23315960" cy="1"/>
+            <a:off x="517046" y="1257299"/>
+            <a:ext cx="23315963" cy="11"/>
           </a:xfrm>
           <a:prstGeom prst="line">
             <a:avLst/>
@@ -3625,9 +3626,9 @@
                     <a:bodyPr/>
                     <a:lstStyle/>
                     <a:p>
-                      <a:pPr indent="457200">
+                      <a:pPr>
                         <a:defRPr>
-                          <a:sym typeface="Helvetica Neue Medium"/>
+                          <a:sym typeface="Helvetica Neue"/>
                         </a:defRPr>
                       </a:pPr>
                     </a:p>
@@ -3745,8 +3746,8 @@
         </p:nvSpPr>
         <p:spPr>
           <a:xfrm>
-            <a:off x="1066797" y="190498"/>
-            <a:ext cx="22250406" cy="1066804"/>
+            <a:off x="1066796" y="190498"/>
+            <a:ext cx="22250408" cy="1066804"/>
           </a:xfrm>
           <a:prstGeom prst="rect">
             <a:avLst/>
@@ -3785,8 +3786,8 @@
         </p:nvSpPr>
         <p:spPr>
           <a:xfrm>
-            <a:off x="1066797" y="1543047"/>
-            <a:ext cx="22250406" cy="11239505"/>
+            <a:off x="1066796" y="1543046"/>
+            <a:ext cx="22250408" cy="11239508"/>
           </a:xfrm>
           <a:prstGeom prst="rect">
             <a:avLst/>
@@ -3933,8 +3934,8 @@
         </p:nvSpPr>
         <p:spPr>
           <a:xfrm>
-            <a:off x="11469885" y="9605622"/>
-            <a:ext cx="334569" cy="338481"/>
+            <a:off x="11469885" y="9605628"/>
+            <a:ext cx="334570" cy="338480"/>
           </a:xfrm>
           <a:prstGeom prst="rect">
             <a:avLst/>
@@ -4101,7 +4102,7 @@
         <p:spPr>
           <a:xfrm>
             <a:off x="11959031" y="13081000"/>
-            <a:ext cx="453238" cy="461059"/>
+            <a:ext cx="453239" cy="461059"/>
           </a:xfrm>
           <a:prstGeom prst="rect">
             <a:avLst/>
@@ -4518,7 +4519,7 @@
           <a:sym typeface="Helvetica Neue"/>
         </a:defRPr>
       </a:lvl5pPr>
-      <a:lvl6pPr marL="3761153" marR="0" indent="-586153" algn="l" defTabSz="825500" rtl="0" latinLnBrk="0">
+      <a:lvl6pPr marL="3761151" marR="0" indent="-586152" algn="l" defTabSz="825500" rtl="0" latinLnBrk="0">
         <a:lnSpc>
           <a:spcPct val="100000"/>
         </a:lnSpc>
@@ -4544,7 +4545,7 @@
           <a:sym typeface="Helvetica Neue"/>
         </a:defRPr>
       </a:lvl6pPr>
-      <a:lvl7pPr marL="4396153" marR="0" indent="-586153" algn="l" defTabSz="825500" rtl="0" latinLnBrk="0">
+      <a:lvl7pPr marL="4396151" marR="0" indent="-586151" algn="l" defTabSz="825500" rtl="0" latinLnBrk="0">
         <a:lnSpc>
           <a:spcPct val="100000"/>
         </a:lnSpc>
@@ -4570,7 +4571,7 @@
           <a:sym typeface="Helvetica Neue"/>
         </a:defRPr>
       </a:lvl7pPr>
-      <a:lvl8pPr marL="5031153" marR="0" indent="-586153" algn="l" defTabSz="825500" rtl="0" latinLnBrk="0">
+      <a:lvl8pPr marL="5031151" marR="0" indent="-586151" algn="l" defTabSz="825500" rtl="0" latinLnBrk="0">
         <a:lnSpc>
           <a:spcPct val="100000"/>
         </a:lnSpc>
@@ -4596,7 +4597,7 @@
           <a:sym typeface="Helvetica Neue"/>
         </a:defRPr>
       </a:lvl8pPr>
-      <a:lvl9pPr marL="5666153" marR="0" indent="-586153" algn="l" defTabSz="825500" rtl="0" latinLnBrk="0">
+      <a:lvl9pPr marL="5666151" marR="0" indent="-586151" algn="l" defTabSz="825500" rtl="0" latinLnBrk="0">
         <a:lnSpc>
           <a:spcPct val="100000"/>
         </a:lnSpc>
@@ -4888,8 +4889,8 @@
         </p:nvSpPr>
         <p:spPr>
           <a:xfrm>
-            <a:off x="1029949" y="349249"/>
-            <a:ext cx="10666751" cy="558801"/>
+            <a:off x="1029948" y="349245"/>
+            <a:ext cx="10666753" cy="558801"/>
           </a:xfrm>
           <a:prstGeom prst="rect">
             <a:avLst/>
@@ -4934,7 +4935,7 @@
         <p:spPr>
           <a:xfrm>
             <a:off x="12720917" y="901700"/>
-            <a:ext cx="11252989" cy="12420600"/>
+            <a:ext cx="11252998" cy="12420600"/>
           </a:xfrm>
           <a:prstGeom prst="rect">
             <a:avLst/>
@@ -4955,6 +4956,10 @@
                 <a:solidFill>
                   <a:srgbClr val="FFFFFF"/>
                 </a:solidFill>
+                <a:latin typeface="Helvetica Neue Medium"/>
+                <a:ea typeface="Helvetica Neue Medium"/>
+                <a:cs typeface="Helvetica Neue Medium"/>
+                <a:sym typeface="Helvetica Neue Medium"/>
               </a:defRPr>
             </a:pPr>
           </a:p>
@@ -4968,8 +4973,8 @@
         </p:nvSpPr>
         <p:spPr>
           <a:xfrm>
-            <a:off x="12963287" y="1049734"/>
-            <a:ext cx="10768248" cy="406401"/>
+            <a:off x="12963286" y="1049734"/>
+            <a:ext cx="10768259" cy="406401"/>
           </a:xfrm>
           <a:prstGeom prst="rect">
             <a:avLst/>
@@ -5012,8 +5017,8 @@
           <p:nvPr/>
         </p:nvGraphicFramePr>
         <p:xfrm>
-          <a:off x="1060883" y="933373"/>
-          <a:ext cx="11594974" cy="12395354"/>
+          <a:off x="1060883" y="933372"/>
+          <a:ext cx="11582273" cy="10609740"/>
         </p:xfrm>
         <a:graphic xmlns:a="http://schemas.openxmlformats.org/drawingml/2006/main">
           <a:graphicData uri="http://schemas.openxmlformats.org/drawingml/2006/table">
@@ -5475,9 +5480,9 @@
                     <a:bodyPr/>
                     <a:lstStyle/>
                     <a:p>
-                      <a:pPr indent="457200">
+                      <a:pPr>
                         <a:defRPr>
-                          <a:sym typeface="Helvetica Neue Medium"/>
+                          <a:sym typeface="Helvetica Neue"/>
                         </a:defRPr>
                       </a:pPr>
                     </a:p>
@@ -5557,11 +5562,11 @@
                     <a:lstStyle/>
                     <a:p>
                       <a:pPr algn="l">
-                        <a:defRPr sz="1200"/>
+                        <a:defRPr sz="1800"/>
                       </a:pPr>
                       <a:r>
                         <a:rPr sz="1200">
-                          <a:sym typeface="Helvetica Neue Medium"/>
+                          <a:sym typeface="Helvetica Neue"/>
                         </a:rPr>
                         <a:t>{ISSUE_DESCRIPTION}</a:t>
                       </a:r>
@@ -5645,11 +5650,11 @@
                     <a:lstStyle/>
                     <a:p>
                       <a:pPr algn="l">
-                        <a:defRPr sz="1200"/>
+                        <a:defRPr sz="1800"/>
                       </a:pPr>
                       <a:r>
                         <a:rPr sz="1200">
-                          <a:sym typeface="Helvetica Neue Medium"/>
+                          <a:sym typeface="Helvetica Neue"/>
                         </a:rPr>
                         <a:t>{ISSUE_ANALYSIS}</a:t>
                       </a:r>
@@ -5733,11 +5738,11 @@
                     <a:lstStyle/>
                     <a:p>
                       <a:pPr algn="l">
-                        <a:defRPr sz="1200"/>
+                        <a:defRPr sz="1800"/>
                       </a:pPr>
                       <a:r>
                         <a:rPr sz="1200">
-                          <a:sym typeface="Helvetica Neue Medium"/>
+                          <a:sym typeface="Helvetica Neue"/>
                         </a:rPr>
                         <a:t>{ROOT_CAUSE}</a:t>
                       </a:r>
@@ -5778,14 +5783,15 @@
                     <a:lstStyle/>
                     <a:p>
                       <a:pPr algn="l">
-                        <a:defRPr b="1">
+                        <a:defRPr sz="1800"/>
+                      </a:pPr>
+                      <a:r>
+                        <a:rPr b="1" sz="2400">
                           <a:latin typeface="Microsoft JhengHei"/>
                           <a:ea typeface="Microsoft JhengHei"/>
                           <a:cs typeface="Microsoft JhengHei"/>
                           <a:sym typeface="Microsoft JhengHei"/>
-                        </a:defRPr>
-                      </a:pPr>
-                      <a:r>
+                        </a:rPr>
                         <a:t> 圍堵措施：</a:t>
                       </a:r>
                     </a:p>
@@ -5820,11 +5826,11 @@
                     <a:lstStyle/>
                     <a:p>
                       <a:pPr algn="l">
-                        <a:defRPr sz="1200"/>
+                        <a:defRPr sz="1800"/>
                       </a:pPr>
                       <a:r>
                         <a:rPr sz="1200">
-                          <a:sym typeface="Helvetica Neue Medium"/>
+                          <a:sym typeface="Helvetica Neue"/>
                         </a:rPr>
                         <a:t>{CONTAINMENT}</a:t>
                       </a:r>
@@ -5908,11 +5914,11 @@
                     <a:lstStyle/>
                     <a:p>
                       <a:pPr algn="l">
-                        <a:defRPr sz="1200"/>
+                        <a:defRPr sz="1800"/>
                       </a:pPr>
                       <a:r>
                         <a:rPr sz="1200">
-                          <a:sym typeface="Helvetica Neue Medium"/>
+                          <a:sym typeface="Helvetica Neue"/>
                         </a:rPr>
                         <a:t>{CORRECTIVE}</a:t>
                       </a:r>
@@ -5950,6 +5956,158 @@
           </a:graphicData>
         </a:graphic>
       </p:graphicFrame>
+    </p:spTree>
+  </p:cSld>
+  <p:clrMapOvr>
+    <a:masterClrMapping/>
+  </p:clrMapOvr>
+  <p:transition xmlns:p14="http://schemas.microsoft.com/office/powerpoint/2010/main" spd="med" advClick="1"/>
+</p:sld>
+</file>
+
+<file path=ppt/slides/slide2.xml><?xml version="1.0" encoding="utf-8"?>
+<p:sld xmlns:a="http://schemas.openxmlformats.org/drawingml/2006/main" xmlns:r="http://schemas.openxmlformats.org/officeDocument/2006/relationships" xmlns:p="http://schemas.openxmlformats.org/presentationml/2006/main" xmlns:m="http://schemas.openxmlformats.org/officeDocument/2006/math" xmlns:a14="http://schemas.microsoft.com/office/drawing/2010/main" showMasterSp="1" showMasterPhAnim="1">
+  <p:cSld>
+    <p:spTree>
+      <p:nvGrpSpPr>
+        <p:cNvPr id="1" name=""/>
+        <p:cNvGrpSpPr/>
+        <p:nvPr/>
+      </p:nvGrpSpPr>
+      <p:grpSpPr>
+        <a:xfrm>
+          <a:off x="0" y="0"/>
+          <a:ext cx="0" cy="0"/>
+          <a:chOff x="0" y="0"/>
+          <a:chExt cx="0" cy="0"/>
+        </a:xfrm>
+      </p:grpSpPr>
+      <p:sp>
+        <p:nvSpPr>
+          <p:cNvPr id="159" name="参考资料"/>
+          <p:cNvSpPr txBox="1"/>
+          <p:nvPr/>
+        </p:nvSpPr>
+        <p:spPr>
+          <a:xfrm>
+            <a:off x="1661685" y="501623"/>
+            <a:ext cx="1638301" cy="635001"/>
+          </a:xfrm>
+          <a:prstGeom prst="rect">
+            <a:avLst/>
+          </a:prstGeom>
+          <a:ln w="12700">
+            <a:miter lim="400000"/>
+          </a:ln>
+          <a:extLst>
+            <a:ext uri="{C572A759-6A51-4108-AA02-DFA0A04FC94B}">
+              <ma14:wrappingTextBoxFlag xmlns:ma14="http://schemas.microsoft.com/office/mac/drawingml/2011/main" val="1"/>
+            </a:ext>
+          </a:extLst>
+        </p:spPr>
+        <p:txBody>
+          <a:bodyPr wrap="none" lIns="50800" tIns="50800" rIns="50800" bIns="50800" anchor="ctr">
+            <a:spAutoFit/>
+          </a:bodyPr>
+          <a:lstStyle/>
+          <a:p>
+            <a:pPr/>
+            <a:r>
+              <a:t>参考资料</a:t>
+            </a:r>
+          </a:p>
+        </p:txBody>
+      </p:sp>
+      <p:sp>
+        <p:nvSpPr>
+          <p:cNvPr id="160" name="{Related_text}"/>
+          <p:cNvSpPr txBox="1"/>
+          <p:nvPr/>
+        </p:nvSpPr>
+        <p:spPr>
+          <a:xfrm>
+            <a:off x="406400" y="7239000"/>
+            <a:ext cx="9626600" cy="279400"/>
+          </a:xfrm>
+          <a:prstGeom prst="rect">
+            <a:avLst/>
+          </a:prstGeom>
+          <a:ln w="12700">
+            <a:miter lim="400000"/>
+          </a:ln>
+          <a:extLst>
+            <a:ext uri="{C572A759-6A51-4108-AA02-DFA0A04FC94B}">
+              <ma14:wrappingTextBoxFlag xmlns:ma14="http://schemas.microsoft.com/office/mac/drawingml/2011/main" val="1"/>
+            </a:ext>
+          </a:extLst>
+        </p:spPr>
+        <p:txBody>
+          <a:bodyPr lIns="50800" tIns="50800" rIns="50800" bIns="50800" anchor="ctr">
+            <a:spAutoFit/>
+          </a:bodyPr>
+          <a:lstStyle>
+            <a:lvl1pPr algn="l">
+              <a:defRPr sz="1200">
+                <a:latin typeface="+mj-lt"/>
+                <a:ea typeface="+mj-ea"/>
+                <a:cs typeface="+mj-cs"/>
+                <a:sym typeface="Helvetica"/>
+              </a:defRPr>
+            </a:lvl1pPr>
+          </a:lstStyle>
+          <a:p>
+            <a:pPr/>
+            <a:r>
+              <a:t>{Related_text}</a:t>
+            </a:r>
+          </a:p>
+        </p:txBody>
+      </p:sp>
+      <p:sp>
+        <p:nvSpPr>
+          <p:cNvPr id="161" name="RelatedText2"/>
+          <p:cNvSpPr txBox="1"/>
+          <p:nvPr/>
+        </p:nvSpPr>
+        <p:spPr>
+          <a:xfrm>
+            <a:off x="10782299" y="7239000"/>
+            <a:ext cx="11785607" cy="279400"/>
+          </a:xfrm>
+          <a:prstGeom prst="rect">
+            <a:avLst/>
+          </a:prstGeom>
+          <a:ln w="12700">
+            <a:miter lim="400000"/>
+          </a:ln>
+          <a:extLst>
+            <a:ext uri="{C572A759-6A51-4108-AA02-DFA0A04FC94B}">
+              <ma14:wrappingTextBoxFlag xmlns:ma14="http://schemas.microsoft.com/office/mac/drawingml/2011/main" val="1"/>
+            </a:ext>
+          </a:extLst>
+        </p:spPr>
+        <p:txBody>
+          <a:bodyPr lIns="50800" tIns="50800" rIns="50800" bIns="50800" anchor="ctr">
+            <a:spAutoFit/>
+          </a:bodyPr>
+          <a:lstStyle>
+            <a:lvl1pPr algn="l">
+              <a:defRPr sz="1200">
+                <a:latin typeface="+mj-lt"/>
+                <a:ea typeface="+mj-ea"/>
+                <a:cs typeface="+mj-cs"/>
+                <a:sym typeface="Helvetica"/>
+              </a:defRPr>
+            </a:lvl1pPr>
+          </a:lstStyle>
+          <a:p>
+            <a:pPr/>
+            <a:r>
+              <a:t>{Related_text_2}</a:t>
+            </a:r>
+          </a:p>
+        </p:txBody>
+      </p:sp>
     </p:spTree>
   </p:cSld>
   <p:clrMapOvr>
@@ -6190,10 +6348,10 @@
             </a:solidFill>
             <a:effectLst/>
             <a:uFillTx/>
-            <a:latin typeface="Helvetica Neue Medium"/>
-            <a:ea typeface="Helvetica Neue Medium"/>
-            <a:cs typeface="Helvetica Neue Medium"/>
-            <a:sym typeface="Helvetica Neue Medium"/>
+            <a:latin typeface="+mn-lt"/>
+            <a:ea typeface="+mn-ea"/>
+            <a:cs typeface="+mn-cs"/>
+            <a:sym typeface="Helvetica Neue"/>
           </a:defRPr>
         </a:defPPr>
         <a:lvl1pPr marL="0" marR="0" indent="0" algn="l" defTabSz="914400" rtl="0" fontAlgn="auto" latinLnBrk="1" hangingPunct="0">
@@ -6761,10 +6919,10 @@
             </a:solidFill>
             <a:effectLst/>
             <a:uFillTx/>
-            <a:latin typeface="Helvetica Neue Medium"/>
-            <a:ea typeface="Helvetica Neue Medium"/>
-            <a:cs typeface="Helvetica Neue Medium"/>
-            <a:sym typeface="Helvetica Neue Medium"/>
+            <a:latin typeface="+mn-lt"/>
+            <a:ea typeface="+mn-ea"/>
+            <a:cs typeface="+mn-cs"/>
+            <a:sym typeface="Helvetica Neue"/>
           </a:defRPr>
         </a:defPPr>
         <a:lvl1pPr marL="0" marR="0" indent="0" algn="l" defTabSz="914400" rtl="0" fontAlgn="auto" latinLnBrk="1" hangingPunct="0">
@@ -7244,10 +7402,10 @@
             </a:solidFill>
             <a:effectLst/>
             <a:uFillTx/>
-            <a:latin typeface="Helvetica Neue Medium"/>
-            <a:ea typeface="Helvetica Neue Medium"/>
-            <a:cs typeface="Helvetica Neue Medium"/>
-            <a:sym typeface="Helvetica Neue Medium"/>
+            <a:latin typeface="+mn-lt"/>
+            <a:ea typeface="+mn-ea"/>
+            <a:cs typeface="+mn-cs"/>
+            <a:sym typeface="Helvetica Neue"/>
           </a:defRPr>
         </a:defPPr>
         <a:lvl1pPr marL="0" marR="0" indent="0" algn="l" defTabSz="914400" rtl="0" fontAlgn="auto" latinLnBrk="1" hangingPunct="0">
@@ -7815,10 +7973,10 @@
             </a:solidFill>
             <a:effectLst/>
             <a:uFillTx/>
-            <a:latin typeface="Helvetica Neue Medium"/>
-            <a:ea typeface="Helvetica Neue Medium"/>
-            <a:cs typeface="Helvetica Neue Medium"/>
-            <a:sym typeface="Helvetica Neue Medium"/>
+            <a:latin typeface="+mn-lt"/>
+            <a:ea typeface="+mn-ea"/>
+            <a:cs typeface="+mn-cs"/>
+            <a:sym typeface="Helvetica Neue"/>
           </a:defRPr>
         </a:defPPr>
         <a:lvl1pPr marL="0" marR="0" indent="0" algn="l" defTabSz="914400" rtl="0" fontAlgn="auto" latinLnBrk="1" hangingPunct="0">

--- a/templates/FACA_Report.pptx
+++ b/templates/FACA_Report.pptx
@@ -10,6 +10,7 @@
   <p:sldIdLst>
     <p:sldId id="256" r:id="rId8"/>
     <p:sldId id="257" r:id="rId9"/>
+    <p:sldId id="258" r:id="rId10"/>
   </p:sldIdLst>
   <p:sldSz cx="24384000" cy="13716000"/>
   <p:notesSz cx="6858000" cy="9144000"/>
@@ -683,7 +684,7 @@
         </p:nvSpPr>
         <p:spPr>
           <a:xfrm>
-            <a:off x="517067" y="1257300"/>
+            <a:off x="517068" y="1257300"/>
             <a:ext cx="23315955" cy="0"/>
           </a:xfrm>
           <a:prstGeom prst="line">
@@ -1145,8 +1146,8 @@
         </p:nvSpPr>
         <p:spPr>
           <a:xfrm>
-            <a:off x="517048" y="1244599"/>
-            <a:ext cx="23315963" cy="11"/>
+            <a:off x="517047" y="1244599"/>
+            <a:ext cx="23315963" cy="12"/>
           </a:xfrm>
           <a:prstGeom prst="line">
             <a:avLst/>
@@ -1487,7 +1488,7 @@
         </p:nvSpPr>
         <p:spPr>
           <a:xfrm>
-            <a:off x="517067" y="1257300"/>
+            <a:off x="517068" y="1257300"/>
             <a:ext cx="23315955" cy="0"/>
           </a:xfrm>
           <a:prstGeom prst="line">
@@ -3003,8 +3004,8 @@
         </p:nvSpPr>
         <p:spPr>
           <a:xfrm>
-            <a:off x="593101" y="881059"/>
-            <a:ext cx="23197815" cy="11"/>
+            <a:off x="593102" y="881059"/>
+            <a:ext cx="23197815" cy="12"/>
           </a:xfrm>
           <a:prstGeom prst="line">
             <a:avLst/>
@@ -3306,7 +3307,7 @@
         <p:spPr>
           <a:xfrm>
             <a:off x="1201340" y="11859862"/>
-            <a:ext cx="21971005" cy="636990"/>
+            <a:ext cx="21971005" cy="636991"/>
           </a:xfrm>
           <a:prstGeom prst="rect">
             <a:avLst/>
@@ -3578,8 +3579,8 @@
         </p:nvSpPr>
         <p:spPr>
           <a:xfrm>
-            <a:off x="517046" y="1257299"/>
-            <a:ext cx="23315963" cy="11"/>
+            <a:off x="517045" y="1257299"/>
+            <a:ext cx="23315963" cy="12"/>
           </a:xfrm>
           <a:prstGeom prst="line">
             <a:avLst/>
@@ -4974,7 +4975,7 @@
         <p:spPr>
           <a:xfrm>
             <a:off x="12963286" y="1049734"/>
-            <a:ext cx="10768259" cy="406401"/>
+            <a:ext cx="10768260" cy="406401"/>
           </a:xfrm>
           <a:prstGeom prst="rect">
             <a:avLst/>
@@ -6072,7 +6073,7 @@
         <p:spPr>
           <a:xfrm>
             <a:off x="10782299" y="7239000"/>
-            <a:ext cx="11785607" cy="279400"/>
+            <a:ext cx="11785608" cy="279400"/>
           </a:xfrm>
           <a:prstGeom prst="rect">
             <a:avLst/>
@@ -6104,6 +6105,158 @@
             <a:pPr/>
             <a:r>
               <a:t>{Related_text_2}</a:t>
+            </a:r>
+          </a:p>
+        </p:txBody>
+      </p:sp>
+    </p:spTree>
+  </p:cSld>
+  <p:clrMapOvr>
+    <a:masterClrMapping/>
+  </p:clrMapOvr>
+  <p:transition xmlns:p14="http://schemas.microsoft.com/office/powerpoint/2010/main" spd="med" advClick="1"/>
+</p:sld>
+</file>
+
+<file path=ppt/slides/slide3.xml><?xml version="1.0" encoding="utf-8"?>
+<p:sld xmlns:a="http://schemas.openxmlformats.org/drawingml/2006/main" xmlns:r="http://schemas.openxmlformats.org/officeDocument/2006/relationships" xmlns:p="http://schemas.openxmlformats.org/presentationml/2006/main" xmlns:m="http://schemas.openxmlformats.org/officeDocument/2006/math" xmlns:a14="http://schemas.microsoft.com/office/drawing/2010/main" showMasterSp="1" showMasterPhAnim="1">
+  <p:cSld>
+    <p:spTree>
+      <p:nvGrpSpPr>
+        <p:cNvPr id="1" name=""/>
+        <p:cNvGrpSpPr/>
+        <p:nvPr/>
+      </p:nvGrpSpPr>
+      <p:grpSpPr>
+        <a:xfrm>
+          <a:off x="0" y="0"/>
+          <a:ext cx="0" cy="0"/>
+          <a:chOff x="0" y="0"/>
+          <a:chExt cx="0" cy="0"/>
+        </a:xfrm>
+      </p:grpSpPr>
+      <p:sp>
+        <p:nvSpPr>
+          <p:cNvPr id="163" name="参考资料"/>
+          <p:cNvSpPr txBox="1"/>
+          <p:nvPr/>
+        </p:nvSpPr>
+        <p:spPr>
+          <a:xfrm>
+            <a:off x="1661685" y="501623"/>
+            <a:ext cx="1638301" cy="635001"/>
+          </a:xfrm>
+          <a:prstGeom prst="rect">
+            <a:avLst/>
+          </a:prstGeom>
+          <a:ln w="12700">
+            <a:miter lim="400000"/>
+          </a:ln>
+          <a:extLst>
+            <a:ext uri="{C572A759-6A51-4108-AA02-DFA0A04FC94B}">
+              <ma14:wrappingTextBoxFlag xmlns:ma14="http://schemas.microsoft.com/office/mac/drawingml/2011/main" val="1"/>
+            </a:ext>
+          </a:extLst>
+        </p:spPr>
+        <p:txBody>
+          <a:bodyPr wrap="none" lIns="50800" tIns="50800" rIns="50800" bIns="50800" anchor="ctr">
+            <a:spAutoFit/>
+          </a:bodyPr>
+          <a:lstStyle/>
+          <a:p>
+            <a:pPr/>
+            <a:r>
+              <a:t>参考资料</a:t>
+            </a:r>
+          </a:p>
+        </p:txBody>
+      </p:sp>
+      <p:sp>
+        <p:nvSpPr>
+          <p:cNvPr id="164" name="{Related_text}"/>
+          <p:cNvSpPr txBox="1"/>
+          <p:nvPr/>
+        </p:nvSpPr>
+        <p:spPr>
+          <a:xfrm>
+            <a:off x="406400" y="7239000"/>
+            <a:ext cx="9626600" cy="279400"/>
+          </a:xfrm>
+          <a:prstGeom prst="rect">
+            <a:avLst/>
+          </a:prstGeom>
+          <a:ln w="12700">
+            <a:miter lim="400000"/>
+          </a:ln>
+          <a:extLst>
+            <a:ext uri="{C572A759-6A51-4108-AA02-DFA0A04FC94B}">
+              <ma14:wrappingTextBoxFlag xmlns:ma14="http://schemas.microsoft.com/office/mac/drawingml/2011/main" val="1"/>
+            </a:ext>
+          </a:extLst>
+        </p:spPr>
+        <p:txBody>
+          <a:bodyPr lIns="50800" tIns="50800" rIns="50800" bIns="50800" anchor="ctr">
+            <a:spAutoFit/>
+          </a:bodyPr>
+          <a:lstStyle>
+            <a:lvl1pPr algn="l">
+              <a:defRPr sz="1200">
+                <a:latin typeface="+mj-lt"/>
+                <a:ea typeface="+mj-ea"/>
+                <a:cs typeface="+mj-cs"/>
+                <a:sym typeface="Helvetica"/>
+              </a:defRPr>
+            </a:lvl1pPr>
+          </a:lstStyle>
+          <a:p>
+            <a:pPr/>
+            <a:r>
+              <a:t>{Related_text_3}</a:t>
+            </a:r>
+          </a:p>
+        </p:txBody>
+      </p:sp>
+      <p:sp>
+        <p:nvSpPr>
+          <p:cNvPr id="165" name="RelatedText2"/>
+          <p:cNvSpPr txBox="1"/>
+          <p:nvPr/>
+        </p:nvSpPr>
+        <p:spPr>
+          <a:xfrm>
+            <a:off x="10782299" y="7239000"/>
+            <a:ext cx="11785608" cy="279400"/>
+          </a:xfrm>
+          <a:prstGeom prst="rect">
+            <a:avLst/>
+          </a:prstGeom>
+          <a:ln w="12700">
+            <a:miter lim="400000"/>
+          </a:ln>
+          <a:extLst>
+            <a:ext uri="{C572A759-6A51-4108-AA02-DFA0A04FC94B}">
+              <ma14:wrappingTextBoxFlag xmlns:ma14="http://schemas.microsoft.com/office/mac/drawingml/2011/main" val="1"/>
+            </a:ext>
+          </a:extLst>
+        </p:spPr>
+        <p:txBody>
+          <a:bodyPr lIns="50800" tIns="50800" rIns="50800" bIns="50800" anchor="ctr">
+            <a:spAutoFit/>
+          </a:bodyPr>
+          <a:lstStyle>
+            <a:lvl1pPr algn="l">
+              <a:defRPr sz="1200">
+                <a:latin typeface="+mj-lt"/>
+                <a:ea typeface="+mj-ea"/>
+                <a:cs typeface="+mj-cs"/>
+                <a:sym typeface="Helvetica"/>
+              </a:defRPr>
+            </a:lvl1pPr>
+          </a:lstStyle>
+          <a:p>
+            <a:pPr/>
+            <a:r>
+              <a:t>{Related_text_4}</a:t>
             </a:r>
           </a:p>
         </p:txBody>
